--- a/output/cross_stage_concordance/panelB_GO_supported_functional_HOGs.pptx
+++ b/output/cross_stage_concordance/panelB_GO_supported_functional_HOGs.pptx
@@ -7,7 +7,7 @@
   <p:sldIdLst>
     <p:sldId id="256" r:id="rId8"/>
   </p:sldIdLst>
-  <p:sldSz cx="9144000" cy="6858000" type="screen4x3"/>
+  <p:sldSz cx="6675120" cy="5230368" type="screen4x3"/>
   <p:notesSz cx="6858000" cy="9144000"/>
   <p:custDataLst>
     <p:tags r:id="rId3"/>
